--- a/보장분석지_조성래.pptx
+++ b/보장분석지_조성래.pptx
@@ -3690,7 +3690,7 @@
                 <a:latin typeface="HY엽서M" panose="02030600000101010101" pitchFamily="18" charset="-127"/>
                 <a:ea typeface="HY엽서M" panose="02030600000101010101" pitchFamily="18" charset="-127"/>
               </a:rPr>
-              <a:t>2026년 07월 02일 기준</a:t>
+              <a:t>2026년 07월 03일 기준</a:t>
             </a:r>
           </a:p>
         </p:txBody>
@@ -6857,26 +6857,101 @@
                 <a:latin typeface="HY엽서M" panose="02030600000101010101" pitchFamily="18" charset="-127"/>
                 <a:ea typeface="HY엽서M" panose="02030600000101010101" pitchFamily="18" charset="-127"/>
               </a:rPr>
-              <a:t>: 10,100</a:t>
+              <a:t>: 7,600</a:t>
+            </a:r>
+          </a:p>
+          <a:p>
+            <a:r>
+              <a:rPr lang="ko-KR" altLang="en-US" sz="1019" dirty="0" err="1">
+                <a:latin typeface="HY엽서M" panose="02030600000101010101" pitchFamily="18" charset="-127"/>
+                <a:ea typeface="HY엽서M" panose="02030600000101010101" pitchFamily="18" charset="-127"/>
+              </a:rPr>
+              <a:t>유사암</a:t>
+            </a:r>
+            <a:r>
+              <a:rPr lang="ko-KR" altLang="en-US" sz="1019" dirty="0">
+                <a:latin typeface="HY엽서M" panose="02030600000101010101" pitchFamily="18" charset="-127"/>
+                <a:ea typeface="HY엽서M" panose="02030600000101010101" pitchFamily="18" charset="-127"/>
+              </a:rPr>
+              <a:t> </a:t>
             </a:r>
             <a:r>
               <a:rPr lang="en-US" altLang="ko-KR" sz="1019" dirty="0">
                 <a:solidFill>
+                  <a:srgbClr val="0000FF"/>
+                </a:solidFill>
+                <a:latin typeface="HY엽서M" panose="02030600000101010101" pitchFamily="18" charset="-127"/>
+                <a:ea typeface="HY엽서M" panose="02030600000101010101" pitchFamily="18" charset="-127"/>
+              </a:rPr>
+              <a:t>: 420</a:t>
+            </a:r>
+          </a:p>
+          <a:p>
+            <a:r>
+              <a:rPr lang="ko-KR" altLang="en-US" sz="1019" dirty="0">
+                <a:latin typeface="HY엽서M" panose="02030600000101010101" pitchFamily="18" charset="-127"/>
+                <a:ea typeface="HY엽서M" panose="02030600000101010101" pitchFamily="18" charset="-127"/>
+              </a:rPr>
+              <a:t>통합전이암 </a:t>
+            </a:r>
+            <a:r>
+              <a:rPr lang="en-US" altLang="ko-KR" sz="1019" dirty="0">
+                <a:latin typeface="HY엽서M" panose="02030600000101010101" pitchFamily="18" charset="-127"/>
+                <a:ea typeface="HY엽서M" panose="02030600000101010101" pitchFamily="18" charset="-127"/>
+              </a:rPr>
+              <a:t>: </a:t>
+            </a:r>
+          </a:p>
+          <a:p>
+            <a:r>
+              <a:rPr lang="ko-KR" altLang="en-US" sz="1019" dirty="0" err="1">
+                <a:latin typeface="HY엽서M" panose="02030600000101010101" pitchFamily="18" charset="-127"/>
+                <a:ea typeface="HY엽서M" panose="02030600000101010101" pitchFamily="18" charset="-127"/>
+              </a:rPr>
+              <a:t>중입자</a:t>
+            </a:r>
+            <a:r>
+              <a:rPr lang="ko-KR" altLang="en-US" sz="1019" dirty="0">
+                <a:latin typeface="HY엽서M" panose="02030600000101010101" pitchFamily="18" charset="-127"/>
+                <a:ea typeface="HY엽서M" panose="02030600000101010101" pitchFamily="18" charset="-127"/>
+              </a:rPr>
+              <a:t> </a:t>
+            </a:r>
+            <a:r>
+              <a:rPr lang="en-US" altLang="ko-KR" sz="1019">
+                <a:solidFill>
                   <a:srgbClr val="000000"/>
                 </a:solidFill>
                 <a:latin typeface="HY엽서M" panose="02030600000101010101" pitchFamily="18" charset="-127"/>
                 <a:ea typeface="HY엽서M" panose="02030600000101010101" pitchFamily="18" charset="-127"/>
               </a:rPr>
-              <a:t>+500</a:t>
-            </a:r>
-          </a:p>
-          <a:p>
+              <a:t>: 5,000</a:t>
+            </a:r>
+          </a:p>
+          <a:p>
+            <a:r>
+              <a:rPr lang="ko-KR" altLang="en-US" sz="1019" dirty="0">
+                <a:latin typeface="HY엽서M" panose="02030600000101010101" pitchFamily="18" charset="-127"/>
+                <a:ea typeface="HY엽서M" panose="02030600000101010101" pitchFamily="18" charset="-127"/>
+              </a:rPr>
+              <a:t>항암치료 </a:t>
+            </a:r>
+            <a:r>
+              <a:rPr lang="en-US" altLang="ko-KR" sz="1019" dirty="0">
+                <a:solidFill>
+                  <a:srgbClr val="0000FF"/>
+                </a:solidFill>
+                <a:latin typeface="HY엽서M" panose="02030600000101010101" pitchFamily="18" charset="-127"/>
+                <a:ea typeface="HY엽서M" panose="02030600000101010101" pitchFamily="18" charset="-127"/>
+              </a:rPr>
+              <a:t>: 2,500 / </a:t>
+            </a:r>
             <a:r>
               <a:rPr lang="ko-KR" altLang="en-US" sz="1019" dirty="0" err="1">
                 <a:latin typeface="HY엽서M" panose="02030600000101010101" pitchFamily="18" charset="-127"/>
                 <a:ea typeface="HY엽서M" panose="02030600000101010101" pitchFamily="18" charset="-127"/>
               </a:rPr>
-              <a:t>유사암</a:t>
+              <a:t>전이암항암치료</a:t>
             </a:r>
             <a:r>
               <a:rPr lang="ko-KR" altLang="en-US" sz="1019" dirty="0">
@@ -6887,134 +6962,29 @@
             </a:r>
             <a:r>
               <a:rPr lang="en-US" altLang="ko-KR" sz="1019" dirty="0">
+                <a:latin typeface="HY엽서M" panose="02030600000101010101" pitchFamily="18" charset="-127"/>
+                <a:ea typeface="HY엽서M" panose="02030600000101010101" pitchFamily="18" charset="-127"/>
+              </a:rPr>
+              <a:t>:</a:t>
+            </a:r>
+          </a:p>
+          <a:p>
+            <a:r>
+              <a:rPr lang="ko-KR" altLang="en-US" sz="1019" dirty="0">
+                <a:latin typeface="HY엽서M" panose="02030600000101010101" pitchFamily="18" charset="-127"/>
+                <a:ea typeface="HY엽서M" panose="02030600000101010101" pitchFamily="18" charset="-127"/>
+              </a:rPr>
+              <a:t>표적치료</a:t>
+            </a:r>
+            <a:r>
+              <a:rPr lang="en-US" altLang="ko-KR" sz="1019" dirty="0">
                 <a:solidFill>
                   <a:srgbClr val="0000FF"/>
                 </a:solidFill>
                 <a:latin typeface="HY엽서M" panose="02030600000101010101" pitchFamily="18" charset="-127"/>
                 <a:ea typeface="HY엽서M" panose="02030600000101010101" pitchFamily="18" charset="-127"/>
               </a:rPr>
-              <a:t>: 320</a:t>
-            </a:r>
-            <a:r>
-              <a:rPr lang="en-US" altLang="ko-KR" sz="1019" dirty="0">
-                <a:solidFill>
-                  <a:srgbClr val="000000"/>
-                </a:solidFill>
-                <a:latin typeface="HY엽서M" panose="02030600000101010101" pitchFamily="18" charset="-127"/>
-                <a:ea typeface="HY엽서M" panose="02030600000101010101" pitchFamily="18" charset="-127"/>
-              </a:rPr>
-              <a:t>+300</a:t>
-            </a:r>
-          </a:p>
-          <a:p>
-            <a:r>
-              <a:rPr lang="ko-KR" altLang="en-US" sz="1019" dirty="0">
-                <a:latin typeface="HY엽서M" panose="02030600000101010101" pitchFamily="18" charset="-127"/>
-                <a:ea typeface="HY엽서M" panose="02030600000101010101" pitchFamily="18" charset="-127"/>
-              </a:rPr>
-              <a:t>통합전이암 </a:t>
-            </a:r>
-            <a:r>
-              <a:rPr lang="en-US" altLang="ko-KR" sz="1019" dirty="0">
-                <a:latin typeface="HY엽서M" panose="02030600000101010101" pitchFamily="18" charset="-127"/>
-                <a:ea typeface="HY엽서M" panose="02030600000101010101" pitchFamily="18" charset="-127"/>
-              </a:rPr>
-              <a:t>: </a:t>
-            </a:r>
-          </a:p>
-          <a:p>
-            <a:r>
-              <a:rPr lang="ko-KR" altLang="en-US" sz="1019" dirty="0" err="1">
-                <a:latin typeface="HY엽서M" panose="02030600000101010101" pitchFamily="18" charset="-127"/>
-                <a:ea typeface="HY엽서M" panose="02030600000101010101" pitchFamily="18" charset="-127"/>
-              </a:rPr>
-              <a:t>중입자</a:t>
-            </a:r>
-            <a:r>
-              <a:rPr lang="ko-KR" altLang="en-US" sz="1019" dirty="0">
-                <a:latin typeface="HY엽서M" panose="02030600000101010101" pitchFamily="18" charset="-127"/>
-                <a:ea typeface="HY엽서M" panose="02030600000101010101" pitchFamily="18" charset="-127"/>
-              </a:rPr>
-              <a:t> </a:t>
-            </a:r>
-            <a:r>
-              <a:rPr lang="en-US" altLang="ko-KR" sz="1019">
-                <a:solidFill>
-                  <a:srgbClr val="000000"/>
-                </a:solidFill>
-                <a:latin typeface="HY엽서M" panose="02030600000101010101" pitchFamily="18" charset="-127"/>
-                <a:ea typeface="HY엽서M" panose="02030600000101010101" pitchFamily="18" charset="-127"/>
-              </a:rPr>
-              <a:t>: 5,000</a:t>
-            </a:r>
-          </a:p>
-          <a:p>
-            <a:r>
-              <a:rPr lang="ko-KR" altLang="en-US" sz="1019" dirty="0">
-                <a:latin typeface="HY엽서M" panose="02030600000101010101" pitchFamily="18" charset="-127"/>
-                <a:ea typeface="HY엽서M" panose="02030600000101010101" pitchFamily="18" charset="-127"/>
-              </a:rPr>
-              <a:t>항암치료 </a:t>
-            </a:r>
-            <a:r>
-              <a:rPr lang="en-US" altLang="ko-KR" sz="1019" dirty="0">
-                <a:solidFill>
-                  <a:srgbClr val="0000FF"/>
-                </a:solidFill>
-                <a:latin typeface="HY엽서M" panose="02030600000101010101" pitchFamily="18" charset="-127"/>
-                <a:ea typeface="HY엽서M" panose="02030600000101010101" pitchFamily="18" charset="-127"/>
-              </a:rPr>
-              <a:t>: 2,850</a:t>
-            </a:r>
-            <a:r>
-              <a:rPr lang="en-US" altLang="ko-KR" sz="1019" dirty="0">
-                <a:solidFill>
-                  <a:srgbClr val="000000"/>
-                </a:solidFill>
-                <a:latin typeface="HY엽서M" panose="02030600000101010101" pitchFamily="18" charset="-127"/>
-                <a:ea typeface="HY엽서M" panose="02030600000101010101" pitchFamily="18" charset="-127"/>
-              </a:rPr>
-              <a:t>+100 / </a:t>
-            </a:r>
-            <a:r>
-              <a:rPr lang="ko-KR" altLang="en-US" sz="1019" dirty="0" err="1">
-                <a:latin typeface="HY엽서M" panose="02030600000101010101" pitchFamily="18" charset="-127"/>
-                <a:ea typeface="HY엽서M" panose="02030600000101010101" pitchFamily="18" charset="-127"/>
-              </a:rPr>
-              <a:t>전이암항암치료</a:t>
-            </a:r>
-            <a:r>
-              <a:rPr lang="ko-KR" altLang="en-US" sz="1019" dirty="0">
-                <a:latin typeface="HY엽서M" panose="02030600000101010101" pitchFamily="18" charset="-127"/>
-                <a:ea typeface="HY엽서M" panose="02030600000101010101" pitchFamily="18" charset="-127"/>
-              </a:rPr>
-              <a:t> </a:t>
-            </a:r>
-            <a:r>
-              <a:rPr lang="en-US" altLang="ko-KR" sz="1019" dirty="0">
-                <a:latin typeface="HY엽서M" panose="02030600000101010101" pitchFamily="18" charset="-127"/>
-                <a:ea typeface="HY엽서M" panose="02030600000101010101" pitchFamily="18" charset="-127"/>
-              </a:rPr>
-              <a:t>:</a:t>
-            </a:r>
-          </a:p>
-          <a:p>
-            <a:r>
-              <a:rPr lang="ko-KR" altLang="en-US" sz="1019" dirty="0">
-                <a:latin typeface="HY엽서M" panose="02030600000101010101" pitchFamily="18" charset="-127"/>
-                <a:ea typeface="HY엽서M" panose="02030600000101010101" pitchFamily="18" charset="-127"/>
-              </a:rPr>
-              <a:t>표적치료</a:t>
-            </a:r>
-            <a:r>
-              <a:rPr lang="en-US" altLang="ko-KR" sz="1019" dirty="0">
-                <a:solidFill>
-                  <a:srgbClr val="0000FF"/>
-                </a:solidFill>
-                <a:latin typeface="HY엽서M" panose="02030600000101010101" pitchFamily="18" charset="-127"/>
-                <a:ea typeface="HY엽서M" panose="02030600000101010101" pitchFamily="18" charset="-127"/>
-              </a:rPr>
-              <a:t>: 18,000 / </a:t>
+              <a:t>: 10,000 / </a:t>
             </a:r>
             <a:r>
               <a:rPr lang="ko-KR" altLang="en-US" sz="1019" dirty="0">
@@ -7616,7 +7586,7 @@
                 <a:latin typeface="HY엽서M" panose="02030600000101010101" pitchFamily="18" charset="-127"/>
                 <a:ea typeface="HY엽서M" panose="02030600000101010101" pitchFamily="18" charset="-127"/>
               </a:rPr>
-              <a:t>: 60</a:t>
+              <a:t>: 30</a:t>
             </a:r>
           </a:p>
           <a:p>
@@ -7999,7 +7969,7 @@
                 <a:latin typeface="HY엽서M" panose="02030600000101010101" pitchFamily="18" charset="-127"/>
                 <a:ea typeface="HY엽서M" panose="02030600000101010101" pitchFamily="18" charset="-127"/>
               </a:rPr>
-              <a:t>: 22</a:t>
+              <a:t>: 7</a:t>
             </a:r>
           </a:p>
         </p:txBody>
